--- a/topic02-understanding-class-definitions/unit-1/talk-2/b-class-definitions-methods.pptx
+++ b/topic02-understanding-class-definitions/unit-1/talk-2/b-class-definitions-methods.pptx
@@ -507,14 +507,14 @@
           </a:ln>
           <a:extLst>
             <a:ext uri="{909E8E84-426E-40dd-AFC4-6F175D3DCCD1}">
-              <a14:hiddenFill xmlns="" xmlns:a14="http://schemas.microsoft.com/office/drawing/2010/main">
+              <a14:hiddenFill xmlns:a14="http://schemas.microsoft.com/office/drawing/2010/main" xmlns="">
                 <a:solidFill>
                   <a:srgbClr val="FFFFFF"/>
                 </a:solidFill>
               </a14:hiddenFill>
             </a:ext>
             <a:ext uri="{FAA26D3D-D897-4be2-8F04-BA451C77F1D7}">
-              <ma14:placeholderFlag xmlns="" xmlns:ma14="http://schemas.microsoft.com/office/mac/drawingml/2011/main" val="1"/>
+              <ma14:placeholderFlag xmlns:ma14="http://schemas.microsoft.com/office/mac/drawingml/2011/main" xmlns="" val="1"/>
             </a:ext>
           </a:extLst>
         </p:spPr>
@@ -858,14 +858,14 @@
           <a:noFill/>
           <a:extLst>
             <a:ext uri="{909E8E84-426E-40dd-AFC4-6F175D3DCCD1}">
-              <a14:hiddenFill xmlns="" xmlns:a14="http://schemas.microsoft.com/office/drawing/2010/main">
+              <a14:hiddenFill xmlns:a14="http://schemas.microsoft.com/office/drawing/2010/main" xmlns="">
                 <a:solidFill>
                   <a:srgbClr val="FFFFFF"/>
                 </a:solidFill>
               </a14:hiddenFill>
             </a:ext>
             <a:ext uri="{91240B29-F687-4f45-9708-019B960494DF}">
-              <a14:hiddenLine xmlns="" xmlns:a14="http://schemas.microsoft.com/office/drawing/2010/main" w="9525">
+              <a14:hiddenLine xmlns:a14="http://schemas.microsoft.com/office/drawing/2010/main" xmlns="" w="9525">
                 <a:solidFill>
                   <a:srgbClr val="000000"/>
                 </a:solidFill>
@@ -1013,14 +1013,14 @@
           <a:noFill/>
           <a:extLst>
             <a:ext uri="{909E8E84-426E-40dd-AFC4-6F175D3DCCD1}">
-              <a14:hiddenFill xmlns="" xmlns:a14="http://schemas.microsoft.com/office/drawing/2010/main">
+              <a14:hiddenFill xmlns:a14="http://schemas.microsoft.com/office/drawing/2010/main" xmlns="">
                 <a:solidFill>
                   <a:srgbClr val="FFFFFF"/>
                 </a:solidFill>
               </a14:hiddenFill>
             </a:ext>
             <a:ext uri="{91240B29-F687-4f45-9708-019B960494DF}">
-              <a14:hiddenLine xmlns="" xmlns:a14="http://schemas.microsoft.com/office/drawing/2010/main" w="9525">
+              <a14:hiddenLine xmlns:a14="http://schemas.microsoft.com/office/drawing/2010/main" xmlns="" w="9525">
                 <a:solidFill>
                   <a:srgbClr val="000000"/>
                 </a:solidFill>
@@ -1168,14 +1168,14 @@
           <a:noFill/>
           <a:extLst>
             <a:ext uri="{909E8E84-426E-40dd-AFC4-6F175D3DCCD1}">
-              <a14:hiddenFill xmlns="" xmlns:a14="http://schemas.microsoft.com/office/drawing/2010/main">
+              <a14:hiddenFill xmlns:a14="http://schemas.microsoft.com/office/drawing/2010/main" xmlns="">
                 <a:solidFill>
                   <a:srgbClr val="FFFFFF"/>
                 </a:solidFill>
               </a14:hiddenFill>
             </a:ext>
             <a:ext uri="{91240B29-F687-4f45-9708-019B960494DF}">
-              <a14:hiddenLine xmlns="" xmlns:a14="http://schemas.microsoft.com/office/drawing/2010/main" w="9525">
+              <a14:hiddenLine xmlns:a14="http://schemas.microsoft.com/office/drawing/2010/main" xmlns="" w="9525">
                 <a:solidFill>
                   <a:srgbClr val="000000"/>
                 </a:solidFill>
@@ -1347,7 +1347,7 @@
         <p:spPr>
           <a:extLst>
             <a:ext uri="{FAA26D3D-D897-4be2-8F04-BA451C77F1D7}">
-              <ma14:placeholderFlag xmlns="" xmlns:ma14="http://schemas.microsoft.com/office/mac/drawingml/2011/main" val="1"/>
+              <ma14:placeholderFlag xmlns:ma14="http://schemas.microsoft.com/office/mac/drawingml/2011/main" xmlns="" val="1"/>
             </a:ext>
           </a:extLst>
         </p:spPr>
@@ -1421,14 +1421,14 @@
           <a:noFill/>
           <a:extLst>
             <a:ext uri="{909E8E84-426E-40dd-AFC4-6F175D3DCCD1}">
-              <a14:hiddenFill xmlns="" xmlns:a14="http://schemas.microsoft.com/office/drawing/2010/main">
+              <a14:hiddenFill xmlns:a14="http://schemas.microsoft.com/office/drawing/2010/main" xmlns="">
                 <a:solidFill>
                   <a:srgbClr val="FFFFFF"/>
                 </a:solidFill>
               </a14:hiddenFill>
             </a:ext>
             <a:ext uri="{91240B29-F687-4f45-9708-019B960494DF}">
-              <a14:hiddenLine xmlns="" xmlns:a14="http://schemas.microsoft.com/office/drawing/2010/main" w="9525">
+              <a14:hiddenLine xmlns:a14="http://schemas.microsoft.com/office/drawing/2010/main" xmlns="" w="9525">
                 <a:solidFill>
                   <a:srgbClr val="000000"/>
                 </a:solidFill>
@@ -1582,14 +1582,14 @@
           <a:noFill/>
           <a:extLst>
             <a:ext uri="{909E8E84-426E-40dd-AFC4-6F175D3DCCD1}">
-              <a14:hiddenFill xmlns="" xmlns:a14="http://schemas.microsoft.com/office/drawing/2010/main">
+              <a14:hiddenFill xmlns:a14="http://schemas.microsoft.com/office/drawing/2010/main" xmlns="">
                 <a:solidFill>
                   <a:srgbClr val="FFFFFF"/>
                 </a:solidFill>
               </a14:hiddenFill>
             </a:ext>
             <a:ext uri="{91240B29-F687-4f45-9708-019B960494DF}">
-              <a14:hiddenLine xmlns="" xmlns:a14="http://schemas.microsoft.com/office/drawing/2010/main" w="9525">
+              <a14:hiddenLine xmlns:a14="http://schemas.microsoft.com/office/drawing/2010/main" xmlns="" w="9525">
                 <a:solidFill>
                   <a:srgbClr val="000000"/>
                 </a:solidFill>
@@ -1743,14 +1743,14 @@
           <a:noFill/>
           <a:extLst>
             <a:ext uri="{909E8E84-426E-40dd-AFC4-6F175D3DCCD1}">
-              <a14:hiddenFill xmlns="" xmlns:a14="http://schemas.microsoft.com/office/drawing/2010/main">
+              <a14:hiddenFill xmlns:a14="http://schemas.microsoft.com/office/drawing/2010/main" xmlns="">
                 <a:solidFill>
                   <a:srgbClr val="FFFFFF"/>
                 </a:solidFill>
               </a14:hiddenFill>
             </a:ext>
             <a:ext uri="{91240B29-F687-4f45-9708-019B960494DF}">
-              <a14:hiddenLine xmlns="" xmlns:a14="http://schemas.microsoft.com/office/drawing/2010/main" w="9525">
+              <a14:hiddenLine xmlns:a14="http://schemas.microsoft.com/office/drawing/2010/main" xmlns="" w="9525">
                 <a:solidFill>
                   <a:srgbClr val="000000"/>
                 </a:solidFill>
@@ -1942,14 +1942,14 @@
           <a:noFill/>
           <a:extLst>
             <a:ext uri="{909E8E84-426E-40dd-AFC4-6F175D3DCCD1}">
-              <a14:hiddenFill xmlns="" xmlns:a14="http://schemas.microsoft.com/office/drawing/2010/main">
+              <a14:hiddenFill xmlns:a14="http://schemas.microsoft.com/office/drawing/2010/main" xmlns="">
                 <a:solidFill>
                   <a:srgbClr val="FFFFFF"/>
                 </a:solidFill>
               </a14:hiddenFill>
             </a:ext>
             <a:ext uri="{91240B29-F687-4f45-9708-019B960494DF}">
-              <a14:hiddenLine xmlns="" xmlns:a14="http://schemas.microsoft.com/office/drawing/2010/main" w="9525">
+              <a14:hiddenLine xmlns:a14="http://schemas.microsoft.com/office/drawing/2010/main" xmlns="" w="9525">
                 <a:solidFill>
                   <a:srgbClr val="000000"/>
                 </a:solidFill>
@@ -1959,7 +1959,7 @@
               </a14:hiddenLine>
             </a:ext>
             <a:ext uri="{AF507438-7753-43e0-B8FC-AC1667EBCBE1}">
-              <a14:hiddenEffects xmlns="" xmlns:a14="http://schemas.microsoft.com/office/drawing/2010/main">
+              <a14:hiddenEffects xmlns:a14="http://schemas.microsoft.com/office/drawing/2010/main" xmlns="">
                 <a:effectLst>
                   <a:outerShdw dist="35921" dir="2700000" algn="ctr" rotWithShape="0">
                     <a:srgbClr val="808080"/>
@@ -1968,10 +1968,10 @@
               </a14:hiddenEffects>
             </a:ext>
             <a:ext uri="{53640926-AAD7-44d8-BBD7-CCE9431645EC}">
-              <a14:shadowObscured xmlns="" xmlns:a14="http://schemas.microsoft.com/office/drawing/2010/main" val="1"/>
+              <a14:shadowObscured xmlns:a14="http://schemas.microsoft.com/office/drawing/2010/main" xmlns="" val="1"/>
             </a:ext>
             <a:ext uri="{FAA26D3D-D897-4be2-8F04-BA451C77F1D7}">
-              <ma14:placeholderFlag xmlns="" xmlns:ma14="http://schemas.microsoft.com/office/mac/drawingml/2011/main" val="1"/>
+              <ma14:placeholderFlag xmlns:ma14="http://schemas.microsoft.com/office/mac/drawingml/2011/main" xmlns="" val="1"/>
             </a:ext>
           </a:extLst>
         </p:spPr>
@@ -2031,14 +2031,14 @@
           <a:noFill/>
           <a:extLst>
             <a:ext uri="{909E8E84-426E-40dd-AFC4-6F175D3DCCD1}">
-              <a14:hiddenFill xmlns="" xmlns:a14="http://schemas.microsoft.com/office/drawing/2010/main">
+              <a14:hiddenFill xmlns:a14="http://schemas.microsoft.com/office/drawing/2010/main" xmlns="">
                 <a:solidFill>
                   <a:srgbClr val="FFFFFF"/>
                 </a:solidFill>
               </a14:hiddenFill>
             </a:ext>
             <a:ext uri="{91240B29-F687-4f45-9708-019B960494DF}">
-              <a14:hiddenLine xmlns="" xmlns:a14="http://schemas.microsoft.com/office/drawing/2010/main" w="9525">
+              <a14:hiddenLine xmlns:a14="http://schemas.microsoft.com/office/drawing/2010/main" xmlns="" w="9525">
                 <a:solidFill>
                   <a:srgbClr val="000000"/>
                 </a:solidFill>
@@ -2186,14 +2186,14 @@
           <a:noFill/>
           <a:extLst>
             <a:ext uri="{909E8E84-426E-40dd-AFC4-6F175D3DCCD1}">
-              <a14:hiddenFill xmlns="" xmlns:a14="http://schemas.microsoft.com/office/drawing/2010/main">
+              <a14:hiddenFill xmlns:a14="http://schemas.microsoft.com/office/drawing/2010/main" xmlns="">
                 <a:solidFill>
                   <a:srgbClr val="FFFFFF"/>
                 </a:solidFill>
               </a14:hiddenFill>
             </a:ext>
             <a:ext uri="{91240B29-F687-4f45-9708-019B960494DF}">
-              <a14:hiddenLine xmlns="" xmlns:a14="http://schemas.microsoft.com/office/drawing/2010/main" w="9525">
+              <a14:hiddenLine xmlns:a14="http://schemas.microsoft.com/office/drawing/2010/main" xmlns="" w="9525">
                 <a:solidFill>
                   <a:srgbClr val="000000"/>
                 </a:solidFill>
@@ -2341,14 +2341,14 @@
           <a:noFill/>
           <a:extLst>
             <a:ext uri="{909E8E84-426E-40dd-AFC4-6F175D3DCCD1}">
-              <a14:hiddenFill xmlns="" xmlns:a14="http://schemas.microsoft.com/office/drawing/2010/main">
+              <a14:hiddenFill xmlns:a14="http://schemas.microsoft.com/office/drawing/2010/main" xmlns="">
                 <a:solidFill>
                   <a:srgbClr val="FFFFFF"/>
                 </a:solidFill>
               </a14:hiddenFill>
             </a:ext>
             <a:ext uri="{91240B29-F687-4f45-9708-019B960494DF}">
-              <a14:hiddenLine xmlns="" xmlns:a14="http://schemas.microsoft.com/office/drawing/2010/main" w="9525">
+              <a14:hiddenLine xmlns:a14="http://schemas.microsoft.com/office/drawing/2010/main" xmlns="" w="9525">
                 <a:solidFill>
                   <a:srgbClr val="000000"/>
                 </a:solidFill>
@@ -2528,14 +2528,14 @@
           <a:noFill/>
           <a:extLst>
             <a:ext uri="{909E8E84-426E-40dd-AFC4-6F175D3DCCD1}">
-              <a14:hiddenFill xmlns="" xmlns:a14="http://schemas.microsoft.com/office/drawing/2010/main">
+              <a14:hiddenFill xmlns:a14="http://schemas.microsoft.com/office/drawing/2010/main" xmlns="">
                 <a:solidFill>
                   <a:srgbClr val="FFFFFF"/>
                 </a:solidFill>
               </a14:hiddenFill>
             </a:ext>
             <a:ext uri="{91240B29-F687-4f45-9708-019B960494DF}">
-              <a14:hiddenLine xmlns="" xmlns:a14="http://schemas.microsoft.com/office/drawing/2010/main" w="9525">
+              <a14:hiddenLine xmlns:a14="http://schemas.microsoft.com/office/drawing/2010/main" xmlns="" w="9525">
                 <a:solidFill>
                   <a:srgbClr val="000000"/>
                 </a:solidFill>
@@ -2545,7 +2545,7 @@
               </a14:hiddenLine>
             </a:ext>
             <a:ext uri="{AF507438-7753-43e0-B8FC-AC1667EBCBE1}">
-              <a14:hiddenEffects xmlns="" xmlns:a14="http://schemas.microsoft.com/office/drawing/2010/main">
+              <a14:hiddenEffects xmlns:a14="http://schemas.microsoft.com/office/drawing/2010/main" xmlns="">
                 <a:effectLst>
                   <a:outerShdw dist="35921" dir="2700000" algn="ctr" rotWithShape="0">
                     <a:srgbClr val="808080"/>
@@ -2554,10 +2554,10 @@
               </a14:hiddenEffects>
             </a:ext>
             <a:ext uri="{53640926-AAD7-44d8-BBD7-CCE9431645EC}">
-              <a14:shadowObscured xmlns="" xmlns:a14="http://schemas.microsoft.com/office/drawing/2010/main" val="1"/>
+              <a14:shadowObscured xmlns:a14="http://schemas.microsoft.com/office/drawing/2010/main" xmlns="" val="1"/>
             </a:ext>
             <a:ext uri="{FAA26D3D-D897-4be2-8F04-BA451C77F1D7}">
-              <ma14:placeholderFlag xmlns="" xmlns:ma14="http://schemas.microsoft.com/office/mac/drawingml/2011/main" val="1"/>
+              <ma14:placeholderFlag xmlns:ma14="http://schemas.microsoft.com/office/mac/drawingml/2011/main" xmlns="" val="1"/>
             </a:ext>
           </a:extLst>
         </p:spPr>
@@ -2617,14 +2617,14 @@
           <a:noFill/>
           <a:extLst>
             <a:ext uri="{909E8E84-426E-40dd-AFC4-6F175D3DCCD1}">
-              <a14:hiddenFill xmlns="" xmlns:a14="http://schemas.microsoft.com/office/drawing/2010/main">
+              <a14:hiddenFill xmlns:a14="http://schemas.microsoft.com/office/drawing/2010/main" xmlns="">
                 <a:solidFill>
                   <a:srgbClr val="FFFFFF"/>
                 </a:solidFill>
               </a14:hiddenFill>
             </a:ext>
             <a:ext uri="{91240B29-F687-4f45-9708-019B960494DF}">
-              <a14:hiddenLine xmlns="" xmlns:a14="http://schemas.microsoft.com/office/drawing/2010/main" w="9525">
+              <a14:hiddenLine xmlns:a14="http://schemas.microsoft.com/office/drawing/2010/main" xmlns="" w="9525">
                 <a:solidFill>
                   <a:srgbClr val="000000"/>
                 </a:solidFill>
@@ -2772,14 +2772,14 @@
           <a:noFill/>
           <a:extLst>
             <a:ext uri="{909E8E84-426E-40dd-AFC4-6F175D3DCCD1}">
-              <a14:hiddenFill xmlns="" xmlns:a14="http://schemas.microsoft.com/office/drawing/2010/main">
+              <a14:hiddenFill xmlns:a14="http://schemas.microsoft.com/office/drawing/2010/main" xmlns="">
                 <a:solidFill>
                   <a:srgbClr val="FFFFFF"/>
                 </a:solidFill>
               </a14:hiddenFill>
             </a:ext>
             <a:ext uri="{91240B29-F687-4f45-9708-019B960494DF}">
-              <a14:hiddenLine xmlns="" xmlns:a14="http://schemas.microsoft.com/office/drawing/2010/main" w="9525">
+              <a14:hiddenLine xmlns:a14="http://schemas.microsoft.com/office/drawing/2010/main" xmlns="" w="9525">
                 <a:solidFill>
                   <a:srgbClr val="000000"/>
                 </a:solidFill>
@@ -2927,14 +2927,14 @@
           <a:noFill/>
           <a:extLst>
             <a:ext uri="{909E8E84-426E-40dd-AFC4-6F175D3DCCD1}">
-              <a14:hiddenFill xmlns="" xmlns:a14="http://schemas.microsoft.com/office/drawing/2010/main">
+              <a14:hiddenFill xmlns:a14="http://schemas.microsoft.com/office/drawing/2010/main" xmlns="">
                 <a:solidFill>
                   <a:srgbClr val="FFFFFF"/>
                 </a:solidFill>
               </a14:hiddenFill>
             </a:ext>
             <a:ext uri="{91240B29-F687-4f45-9708-019B960494DF}">
-              <a14:hiddenLine xmlns="" xmlns:a14="http://schemas.microsoft.com/office/drawing/2010/main" w="9525">
+              <a14:hiddenLine xmlns:a14="http://schemas.microsoft.com/office/drawing/2010/main" xmlns="" w="9525">
                 <a:solidFill>
                   <a:srgbClr val="000000"/>
                 </a:solidFill>
@@ -3106,7 +3106,7 @@
         <p:spPr>
           <a:extLst>
             <a:ext uri="{FAA26D3D-D897-4be2-8F04-BA451C77F1D7}">
-              <ma14:placeholderFlag xmlns="" xmlns:ma14="http://schemas.microsoft.com/office/mac/drawingml/2011/main" val="1"/>
+              <ma14:placeholderFlag xmlns:ma14="http://schemas.microsoft.com/office/mac/drawingml/2011/main" xmlns="" val="1"/>
             </a:ext>
           </a:extLst>
         </p:spPr>
@@ -3168,14 +3168,14 @@
           <a:noFill/>
           <a:extLst>
             <a:ext uri="{909E8E84-426E-40dd-AFC4-6F175D3DCCD1}">
-              <a14:hiddenFill xmlns="" xmlns:a14="http://schemas.microsoft.com/office/drawing/2010/main">
+              <a14:hiddenFill xmlns:a14="http://schemas.microsoft.com/office/drawing/2010/main" xmlns="">
                 <a:solidFill>
                   <a:srgbClr val="FFFFFF"/>
                 </a:solidFill>
               </a14:hiddenFill>
             </a:ext>
             <a:ext uri="{91240B29-F687-4f45-9708-019B960494DF}">
-              <a14:hiddenLine xmlns="" xmlns:a14="http://schemas.microsoft.com/office/drawing/2010/main" w="9525">
+              <a14:hiddenLine xmlns:a14="http://schemas.microsoft.com/office/drawing/2010/main" xmlns="" w="9525">
                 <a:solidFill>
                   <a:srgbClr val="000000"/>
                 </a:solidFill>
@@ -3323,14 +3323,14 @@
           <a:noFill/>
           <a:extLst>
             <a:ext uri="{909E8E84-426E-40dd-AFC4-6F175D3DCCD1}">
-              <a14:hiddenFill xmlns="" xmlns:a14="http://schemas.microsoft.com/office/drawing/2010/main">
+              <a14:hiddenFill xmlns:a14="http://schemas.microsoft.com/office/drawing/2010/main" xmlns="">
                 <a:solidFill>
                   <a:srgbClr val="FFFFFF"/>
                 </a:solidFill>
               </a14:hiddenFill>
             </a:ext>
             <a:ext uri="{91240B29-F687-4f45-9708-019B960494DF}">
-              <a14:hiddenLine xmlns="" xmlns:a14="http://schemas.microsoft.com/office/drawing/2010/main" w="9525">
+              <a14:hiddenLine xmlns:a14="http://schemas.microsoft.com/office/drawing/2010/main" xmlns="" w="9525">
                 <a:solidFill>
                   <a:srgbClr val="000000"/>
                 </a:solidFill>
@@ -3478,14 +3478,14 @@
           <a:noFill/>
           <a:extLst>
             <a:ext uri="{909E8E84-426E-40dd-AFC4-6F175D3DCCD1}">
-              <a14:hiddenFill xmlns="" xmlns:a14="http://schemas.microsoft.com/office/drawing/2010/main">
+              <a14:hiddenFill xmlns:a14="http://schemas.microsoft.com/office/drawing/2010/main" xmlns="">
                 <a:solidFill>
                   <a:srgbClr val="FFFFFF"/>
                 </a:solidFill>
               </a14:hiddenFill>
             </a:ext>
             <a:ext uri="{91240B29-F687-4f45-9708-019B960494DF}">
-              <a14:hiddenLine xmlns="" xmlns:a14="http://schemas.microsoft.com/office/drawing/2010/main" w="9525">
+              <a14:hiddenLine xmlns:a14="http://schemas.microsoft.com/office/drawing/2010/main" xmlns="" w="9525">
                 <a:solidFill>
                   <a:srgbClr val="000000"/>
                 </a:solidFill>
@@ -3657,7 +3657,7 @@
         <p:spPr>
           <a:extLst>
             <a:ext uri="{FAA26D3D-D897-4be2-8F04-BA451C77F1D7}">
-              <ma14:placeholderFlag xmlns="" xmlns:ma14="http://schemas.microsoft.com/office/mac/drawingml/2011/main" val="1"/>
+              <ma14:placeholderFlag xmlns:ma14="http://schemas.microsoft.com/office/mac/drawingml/2011/main" xmlns="" val="1"/>
             </a:ext>
           </a:extLst>
         </p:spPr>
@@ -3719,14 +3719,14 @@
           <a:noFill/>
           <a:extLst>
             <a:ext uri="{909E8E84-426E-40dd-AFC4-6F175D3DCCD1}">
-              <a14:hiddenFill xmlns="" xmlns:a14="http://schemas.microsoft.com/office/drawing/2010/main">
+              <a14:hiddenFill xmlns:a14="http://schemas.microsoft.com/office/drawing/2010/main" xmlns="">
                 <a:solidFill>
                   <a:srgbClr val="FFFFFF"/>
                 </a:solidFill>
               </a14:hiddenFill>
             </a:ext>
             <a:ext uri="{91240B29-F687-4f45-9708-019B960494DF}">
-              <a14:hiddenLine xmlns="" xmlns:a14="http://schemas.microsoft.com/office/drawing/2010/main" w="9525">
+              <a14:hiddenLine xmlns:a14="http://schemas.microsoft.com/office/drawing/2010/main" xmlns="" w="9525">
                 <a:solidFill>
                   <a:srgbClr val="000000"/>
                 </a:solidFill>
@@ -3874,14 +3874,14 @@
           <a:noFill/>
           <a:extLst>
             <a:ext uri="{909E8E84-426E-40dd-AFC4-6F175D3DCCD1}">
-              <a14:hiddenFill xmlns="" xmlns:a14="http://schemas.microsoft.com/office/drawing/2010/main">
+              <a14:hiddenFill xmlns:a14="http://schemas.microsoft.com/office/drawing/2010/main" xmlns="">
                 <a:solidFill>
                   <a:srgbClr val="FFFFFF"/>
                 </a:solidFill>
               </a14:hiddenFill>
             </a:ext>
             <a:ext uri="{91240B29-F687-4f45-9708-019B960494DF}">
-              <a14:hiddenLine xmlns="" xmlns:a14="http://schemas.microsoft.com/office/drawing/2010/main" w="9525">
+              <a14:hiddenLine xmlns:a14="http://schemas.microsoft.com/office/drawing/2010/main" xmlns="" w="9525">
                 <a:solidFill>
                   <a:srgbClr val="000000"/>
                 </a:solidFill>
@@ -4029,14 +4029,14 @@
           <a:noFill/>
           <a:extLst>
             <a:ext uri="{909E8E84-426E-40dd-AFC4-6F175D3DCCD1}">
-              <a14:hiddenFill xmlns="" xmlns:a14="http://schemas.microsoft.com/office/drawing/2010/main">
+              <a14:hiddenFill xmlns:a14="http://schemas.microsoft.com/office/drawing/2010/main" xmlns="">
                 <a:solidFill>
                   <a:srgbClr val="FFFFFF"/>
                 </a:solidFill>
               </a14:hiddenFill>
             </a:ext>
             <a:ext uri="{91240B29-F687-4f45-9708-019B960494DF}">
-              <a14:hiddenLine xmlns="" xmlns:a14="http://schemas.microsoft.com/office/drawing/2010/main" w="9525">
+              <a14:hiddenLine xmlns:a14="http://schemas.microsoft.com/office/drawing/2010/main" xmlns="" w="9525">
                 <a:solidFill>
                   <a:srgbClr val="000000"/>
                 </a:solidFill>
@@ -4208,7 +4208,7 @@
         <p:spPr>
           <a:extLst>
             <a:ext uri="{FAA26D3D-D897-4be2-8F04-BA451C77F1D7}">
-              <ma14:placeholderFlag xmlns="" xmlns:ma14="http://schemas.microsoft.com/office/mac/drawingml/2011/main" val="1"/>
+              <ma14:placeholderFlag xmlns:ma14="http://schemas.microsoft.com/office/mac/drawingml/2011/main" xmlns="" val="1"/>
             </a:ext>
           </a:extLst>
         </p:spPr>
@@ -4270,14 +4270,14 @@
           <a:noFill/>
           <a:extLst>
             <a:ext uri="{909E8E84-426E-40dd-AFC4-6F175D3DCCD1}">
-              <a14:hiddenFill xmlns="" xmlns:a14="http://schemas.microsoft.com/office/drawing/2010/main">
+              <a14:hiddenFill xmlns:a14="http://schemas.microsoft.com/office/drawing/2010/main" xmlns="">
                 <a:solidFill>
                   <a:srgbClr val="FFFFFF"/>
                 </a:solidFill>
               </a14:hiddenFill>
             </a:ext>
             <a:ext uri="{91240B29-F687-4f45-9708-019B960494DF}">
-              <a14:hiddenLine xmlns="" xmlns:a14="http://schemas.microsoft.com/office/drawing/2010/main" w="9525">
+              <a14:hiddenLine xmlns:a14="http://schemas.microsoft.com/office/drawing/2010/main" xmlns="" w="9525">
                 <a:solidFill>
                   <a:srgbClr val="000000"/>
                 </a:solidFill>
@@ -4425,14 +4425,14 @@
           <a:noFill/>
           <a:extLst>
             <a:ext uri="{909E8E84-426E-40dd-AFC4-6F175D3DCCD1}">
-              <a14:hiddenFill xmlns="" xmlns:a14="http://schemas.microsoft.com/office/drawing/2010/main">
+              <a14:hiddenFill xmlns:a14="http://schemas.microsoft.com/office/drawing/2010/main" xmlns="">
                 <a:solidFill>
                   <a:srgbClr val="FFFFFF"/>
                 </a:solidFill>
               </a14:hiddenFill>
             </a:ext>
             <a:ext uri="{91240B29-F687-4f45-9708-019B960494DF}">
-              <a14:hiddenLine xmlns="" xmlns:a14="http://schemas.microsoft.com/office/drawing/2010/main" w="9525">
+              <a14:hiddenLine xmlns:a14="http://schemas.microsoft.com/office/drawing/2010/main" xmlns="" w="9525">
                 <a:solidFill>
                   <a:srgbClr val="000000"/>
                 </a:solidFill>
@@ -4580,14 +4580,14 @@
           <a:noFill/>
           <a:extLst>
             <a:ext uri="{909E8E84-426E-40dd-AFC4-6F175D3DCCD1}">
-              <a14:hiddenFill xmlns="" xmlns:a14="http://schemas.microsoft.com/office/drawing/2010/main">
+              <a14:hiddenFill xmlns:a14="http://schemas.microsoft.com/office/drawing/2010/main" xmlns="">
                 <a:solidFill>
                   <a:srgbClr val="FFFFFF"/>
                 </a:solidFill>
               </a14:hiddenFill>
             </a:ext>
             <a:ext uri="{91240B29-F687-4f45-9708-019B960494DF}">
-              <a14:hiddenLine xmlns="" xmlns:a14="http://schemas.microsoft.com/office/drawing/2010/main" w="9525">
+              <a14:hiddenLine xmlns:a14="http://schemas.microsoft.com/office/drawing/2010/main" xmlns="" w="9525">
                 <a:solidFill>
                   <a:srgbClr val="000000"/>
                 </a:solidFill>
@@ -4759,7 +4759,7 @@
         <p:spPr>
           <a:extLst>
             <a:ext uri="{FAA26D3D-D897-4be2-8F04-BA451C77F1D7}">
-              <ma14:placeholderFlag xmlns="" xmlns:ma14="http://schemas.microsoft.com/office/mac/drawingml/2011/main" val="1"/>
+              <ma14:placeholderFlag xmlns:ma14="http://schemas.microsoft.com/office/mac/drawingml/2011/main" xmlns="" val="1"/>
             </a:ext>
           </a:extLst>
         </p:spPr>
@@ -4833,14 +4833,14 @@
           <a:noFill/>
           <a:extLst>
             <a:ext uri="{909E8E84-426E-40dd-AFC4-6F175D3DCCD1}">
-              <a14:hiddenFill xmlns:a14="http://schemas.microsoft.com/office/drawing/2010/main" xmlns="">
+              <a14:hiddenFill xmlns="" xmlns:a14="http://schemas.microsoft.com/office/drawing/2010/main">
                 <a:solidFill>
                   <a:srgbClr val="FFFFFF"/>
                 </a:solidFill>
               </a14:hiddenFill>
             </a:ext>
             <a:ext uri="{91240B29-F687-4f45-9708-019B960494DF}">
-              <a14:hiddenLine xmlns:a14="http://schemas.microsoft.com/office/drawing/2010/main" xmlns="" w="9525">
+              <a14:hiddenLine xmlns="" xmlns:a14="http://schemas.microsoft.com/office/drawing/2010/main" w="9525">
                 <a:solidFill>
                   <a:srgbClr val="000000"/>
                 </a:solidFill>
@@ -4994,14 +4994,14 @@
           <a:noFill/>
           <a:extLst>
             <a:ext uri="{909E8E84-426E-40dd-AFC4-6F175D3DCCD1}">
-              <a14:hiddenFill xmlns:a14="http://schemas.microsoft.com/office/drawing/2010/main" xmlns="">
+              <a14:hiddenFill xmlns="" xmlns:a14="http://schemas.microsoft.com/office/drawing/2010/main">
                 <a:solidFill>
                   <a:srgbClr val="FFFFFF"/>
                 </a:solidFill>
               </a14:hiddenFill>
             </a:ext>
             <a:ext uri="{91240B29-F687-4f45-9708-019B960494DF}">
-              <a14:hiddenLine xmlns:a14="http://schemas.microsoft.com/office/drawing/2010/main" xmlns="" w="9525">
+              <a14:hiddenLine xmlns="" xmlns:a14="http://schemas.microsoft.com/office/drawing/2010/main" w="9525">
                 <a:solidFill>
                   <a:srgbClr val="000000"/>
                 </a:solidFill>
@@ -5155,14 +5155,14 @@
           <a:noFill/>
           <a:extLst>
             <a:ext uri="{909E8E84-426E-40dd-AFC4-6F175D3DCCD1}">
-              <a14:hiddenFill xmlns:a14="http://schemas.microsoft.com/office/drawing/2010/main" xmlns="">
+              <a14:hiddenFill xmlns="" xmlns:a14="http://schemas.microsoft.com/office/drawing/2010/main">
                 <a:solidFill>
                   <a:srgbClr val="FFFFFF"/>
                 </a:solidFill>
               </a14:hiddenFill>
             </a:ext>
             <a:ext uri="{91240B29-F687-4f45-9708-019B960494DF}">
-              <a14:hiddenLine xmlns:a14="http://schemas.microsoft.com/office/drawing/2010/main" xmlns="" w="9525">
+              <a14:hiddenLine xmlns="" xmlns:a14="http://schemas.microsoft.com/office/drawing/2010/main" w="9525">
                 <a:solidFill>
                   <a:srgbClr val="000000"/>
                 </a:solidFill>
@@ -5346,7 +5346,7 @@
         <p:spPr>
           <a:extLst>
             <a:ext uri="{FAA26D3D-D897-4be2-8F04-BA451C77F1D7}">
-              <ma14:placeholderFlag xmlns:ma14="http://schemas.microsoft.com/office/mac/drawingml/2011/main" xmlns="" val="1"/>
+              <ma14:placeholderFlag xmlns="" xmlns:ma14="http://schemas.microsoft.com/office/mac/drawingml/2011/main" val="1"/>
             </a:ext>
           </a:extLst>
         </p:spPr>
@@ -5408,14 +5408,14 @@
           <a:noFill/>
           <a:extLst>
             <a:ext uri="{909E8E84-426E-40dd-AFC4-6F175D3DCCD1}">
-              <a14:hiddenFill xmlns="" xmlns:a14="http://schemas.microsoft.com/office/drawing/2010/main">
+              <a14:hiddenFill xmlns:a14="http://schemas.microsoft.com/office/drawing/2010/main" xmlns="">
                 <a:solidFill>
                   <a:srgbClr val="FFFFFF"/>
                 </a:solidFill>
               </a14:hiddenFill>
             </a:ext>
             <a:ext uri="{91240B29-F687-4f45-9708-019B960494DF}">
-              <a14:hiddenLine xmlns="" xmlns:a14="http://schemas.microsoft.com/office/drawing/2010/main" w="9525">
+              <a14:hiddenLine xmlns:a14="http://schemas.microsoft.com/office/drawing/2010/main" xmlns="" w="9525">
                 <a:solidFill>
                   <a:srgbClr val="000000"/>
                 </a:solidFill>
@@ -5563,14 +5563,14 @@
           <a:noFill/>
           <a:extLst>
             <a:ext uri="{909E8E84-426E-40dd-AFC4-6F175D3DCCD1}">
-              <a14:hiddenFill xmlns="" xmlns:a14="http://schemas.microsoft.com/office/drawing/2010/main">
+              <a14:hiddenFill xmlns:a14="http://schemas.microsoft.com/office/drawing/2010/main" xmlns="">
                 <a:solidFill>
                   <a:srgbClr val="FFFFFF"/>
                 </a:solidFill>
               </a14:hiddenFill>
             </a:ext>
             <a:ext uri="{91240B29-F687-4f45-9708-019B960494DF}">
-              <a14:hiddenLine xmlns="" xmlns:a14="http://schemas.microsoft.com/office/drawing/2010/main" w="9525">
+              <a14:hiddenLine xmlns:a14="http://schemas.microsoft.com/office/drawing/2010/main" xmlns="" w="9525">
                 <a:solidFill>
                   <a:srgbClr val="000000"/>
                 </a:solidFill>
@@ -5718,14 +5718,14 @@
           <a:noFill/>
           <a:extLst>
             <a:ext uri="{909E8E84-426E-40dd-AFC4-6F175D3DCCD1}">
-              <a14:hiddenFill xmlns="" xmlns:a14="http://schemas.microsoft.com/office/drawing/2010/main">
+              <a14:hiddenFill xmlns:a14="http://schemas.microsoft.com/office/drawing/2010/main" xmlns="">
                 <a:solidFill>
                   <a:srgbClr val="FFFFFF"/>
                 </a:solidFill>
               </a14:hiddenFill>
             </a:ext>
             <a:ext uri="{91240B29-F687-4f45-9708-019B960494DF}">
-              <a14:hiddenLine xmlns="" xmlns:a14="http://schemas.microsoft.com/office/drawing/2010/main" w="9525">
+              <a14:hiddenLine xmlns:a14="http://schemas.microsoft.com/office/drawing/2010/main" xmlns="" w="9525">
                 <a:solidFill>
                   <a:srgbClr val="000000"/>
                 </a:solidFill>
@@ -5897,7 +5897,7 @@
         <p:spPr>
           <a:extLst>
             <a:ext uri="{FAA26D3D-D897-4be2-8F04-BA451C77F1D7}">
-              <ma14:placeholderFlag xmlns="" xmlns:ma14="http://schemas.microsoft.com/office/mac/drawingml/2011/main" val="1"/>
+              <ma14:placeholderFlag xmlns:ma14="http://schemas.microsoft.com/office/mac/drawingml/2011/main" xmlns="" val="1"/>
             </a:ext>
           </a:extLst>
         </p:spPr>
@@ -5959,14 +5959,14 @@
           <a:noFill/>
           <a:extLst>
             <a:ext uri="{909E8E84-426E-40dd-AFC4-6F175D3DCCD1}">
-              <a14:hiddenFill xmlns="" xmlns:a14="http://schemas.microsoft.com/office/drawing/2010/main">
+              <a14:hiddenFill xmlns:a14="http://schemas.microsoft.com/office/drawing/2010/main" xmlns="">
                 <a:solidFill>
                   <a:srgbClr val="FFFFFF"/>
                 </a:solidFill>
               </a14:hiddenFill>
             </a:ext>
             <a:ext uri="{91240B29-F687-4f45-9708-019B960494DF}">
-              <a14:hiddenLine xmlns="" xmlns:a14="http://schemas.microsoft.com/office/drawing/2010/main" w="9525">
+              <a14:hiddenLine xmlns:a14="http://schemas.microsoft.com/office/drawing/2010/main" xmlns="" w="9525">
                 <a:solidFill>
                   <a:srgbClr val="000000"/>
                 </a:solidFill>
@@ -6114,14 +6114,14 @@
           <a:noFill/>
           <a:extLst>
             <a:ext uri="{909E8E84-426E-40dd-AFC4-6F175D3DCCD1}">
-              <a14:hiddenFill xmlns="" xmlns:a14="http://schemas.microsoft.com/office/drawing/2010/main">
+              <a14:hiddenFill xmlns:a14="http://schemas.microsoft.com/office/drawing/2010/main" xmlns="">
                 <a:solidFill>
                   <a:srgbClr val="FFFFFF"/>
                 </a:solidFill>
               </a14:hiddenFill>
             </a:ext>
             <a:ext uri="{91240B29-F687-4f45-9708-019B960494DF}">
-              <a14:hiddenLine xmlns="" xmlns:a14="http://schemas.microsoft.com/office/drawing/2010/main" w="9525">
+              <a14:hiddenLine xmlns:a14="http://schemas.microsoft.com/office/drawing/2010/main" xmlns="" w="9525">
                 <a:solidFill>
                   <a:srgbClr val="000000"/>
                 </a:solidFill>
@@ -6269,14 +6269,14 @@
           <a:noFill/>
           <a:extLst>
             <a:ext uri="{909E8E84-426E-40dd-AFC4-6F175D3DCCD1}">
-              <a14:hiddenFill xmlns="" xmlns:a14="http://schemas.microsoft.com/office/drawing/2010/main">
+              <a14:hiddenFill xmlns:a14="http://schemas.microsoft.com/office/drawing/2010/main" xmlns="">
                 <a:solidFill>
                   <a:srgbClr val="FFFFFF"/>
                 </a:solidFill>
               </a14:hiddenFill>
             </a:ext>
             <a:ext uri="{91240B29-F687-4f45-9708-019B960494DF}">
-              <a14:hiddenLine xmlns="" xmlns:a14="http://schemas.microsoft.com/office/drawing/2010/main" w="9525">
+              <a14:hiddenLine xmlns:a14="http://schemas.microsoft.com/office/drawing/2010/main" xmlns="" w="9525">
                 <a:solidFill>
                   <a:srgbClr val="000000"/>
                 </a:solidFill>
@@ -6448,7 +6448,7 @@
         <p:spPr>
           <a:extLst>
             <a:ext uri="{FAA26D3D-D897-4be2-8F04-BA451C77F1D7}">
-              <ma14:placeholderFlag xmlns="" xmlns:ma14="http://schemas.microsoft.com/office/mac/drawingml/2011/main" val="1"/>
+              <ma14:placeholderFlag xmlns:ma14="http://schemas.microsoft.com/office/mac/drawingml/2011/main" xmlns="" val="1"/>
             </a:ext>
           </a:extLst>
         </p:spPr>
@@ -6510,14 +6510,14 @@
           <a:noFill/>
           <a:extLst>
             <a:ext uri="{909E8E84-426E-40dd-AFC4-6F175D3DCCD1}">
-              <a14:hiddenFill xmlns="" xmlns:a14="http://schemas.microsoft.com/office/drawing/2010/main">
+              <a14:hiddenFill xmlns:a14="http://schemas.microsoft.com/office/drawing/2010/main" xmlns="">
                 <a:solidFill>
                   <a:srgbClr val="FFFFFF"/>
                 </a:solidFill>
               </a14:hiddenFill>
             </a:ext>
             <a:ext uri="{91240B29-F687-4f45-9708-019B960494DF}">
-              <a14:hiddenLine xmlns="" xmlns:a14="http://schemas.microsoft.com/office/drawing/2010/main" w="9525">
+              <a14:hiddenLine xmlns:a14="http://schemas.microsoft.com/office/drawing/2010/main" xmlns="" w="9525">
                 <a:solidFill>
                   <a:srgbClr val="000000"/>
                 </a:solidFill>
@@ -6665,14 +6665,14 @@
           <a:noFill/>
           <a:extLst>
             <a:ext uri="{909E8E84-426E-40dd-AFC4-6F175D3DCCD1}">
-              <a14:hiddenFill xmlns="" xmlns:a14="http://schemas.microsoft.com/office/drawing/2010/main">
+              <a14:hiddenFill xmlns:a14="http://schemas.microsoft.com/office/drawing/2010/main" xmlns="">
                 <a:solidFill>
                   <a:srgbClr val="FFFFFF"/>
                 </a:solidFill>
               </a14:hiddenFill>
             </a:ext>
             <a:ext uri="{91240B29-F687-4f45-9708-019B960494DF}">
-              <a14:hiddenLine xmlns="" xmlns:a14="http://schemas.microsoft.com/office/drawing/2010/main" w="9525">
+              <a14:hiddenLine xmlns:a14="http://schemas.microsoft.com/office/drawing/2010/main" xmlns="" w="9525">
                 <a:solidFill>
                   <a:srgbClr val="000000"/>
                 </a:solidFill>
@@ -6820,14 +6820,14 @@
           <a:noFill/>
           <a:extLst>
             <a:ext uri="{909E8E84-426E-40dd-AFC4-6F175D3DCCD1}">
-              <a14:hiddenFill xmlns="" xmlns:a14="http://schemas.microsoft.com/office/drawing/2010/main">
+              <a14:hiddenFill xmlns:a14="http://schemas.microsoft.com/office/drawing/2010/main" xmlns="">
                 <a:solidFill>
                   <a:srgbClr val="FFFFFF"/>
                 </a:solidFill>
               </a14:hiddenFill>
             </a:ext>
             <a:ext uri="{91240B29-F687-4f45-9708-019B960494DF}">
-              <a14:hiddenLine xmlns="" xmlns:a14="http://schemas.microsoft.com/office/drawing/2010/main" w="9525">
+              <a14:hiddenLine xmlns:a14="http://schemas.microsoft.com/office/drawing/2010/main" xmlns="" w="9525">
                 <a:solidFill>
                   <a:srgbClr val="000000"/>
                 </a:solidFill>
@@ -6999,7 +6999,7 @@
         <p:spPr>
           <a:extLst>
             <a:ext uri="{FAA26D3D-D897-4be2-8F04-BA451C77F1D7}">
-              <ma14:placeholderFlag xmlns="" xmlns:ma14="http://schemas.microsoft.com/office/mac/drawingml/2011/main" val="1"/>
+              <ma14:placeholderFlag xmlns:ma14="http://schemas.microsoft.com/office/mac/drawingml/2011/main" xmlns="" val="1"/>
             </a:ext>
           </a:extLst>
         </p:spPr>
@@ -7061,14 +7061,14 @@
           <a:noFill/>
           <a:extLst>
             <a:ext uri="{909E8E84-426E-40dd-AFC4-6F175D3DCCD1}">
-              <a14:hiddenFill xmlns="" xmlns:a14="http://schemas.microsoft.com/office/drawing/2010/main">
+              <a14:hiddenFill xmlns:a14="http://schemas.microsoft.com/office/drawing/2010/main" xmlns="">
                 <a:solidFill>
                   <a:srgbClr val="FFFFFF"/>
                 </a:solidFill>
               </a14:hiddenFill>
             </a:ext>
             <a:ext uri="{91240B29-F687-4f45-9708-019B960494DF}">
-              <a14:hiddenLine xmlns="" xmlns:a14="http://schemas.microsoft.com/office/drawing/2010/main" w="9525">
+              <a14:hiddenLine xmlns:a14="http://schemas.microsoft.com/office/drawing/2010/main" xmlns="" w="9525">
                 <a:solidFill>
                   <a:srgbClr val="000000"/>
                 </a:solidFill>
@@ -7216,14 +7216,14 @@
           <a:noFill/>
           <a:extLst>
             <a:ext uri="{909E8E84-426E-40dd-AFC4-6F175D3DCCD1}">
-              <a14:hiddenFill xmlns="" xmlns:a14="http://schemas.microsoft.com/office/drawing/2010/main">
+              <a14:hiddenFill xmlns:a14="http://schemas.microsoft.com/office/drawing/2010/main" xmlns="">
                 <a:solidFill>
                   <a:srgbClr val="FFFFFF"/>
                 </a:solidFill>
               </a14:hiddenFill>
             </a:ext>
             <a:ext uri="{91240B29-F687-4f45-9708-019B960494DF}">
-              <a14:hiddenLine xmlns="" xmlns:a14="http://schemas.microsoft.com/office/drawing/2010/main" w="9525">
+              <a14:hiddenLine xmlns:a14="http://schemas.microsoft.com/office/drawing/2010/main" xmlns="" w="9525">
                 <a:solidFill>
                   <a:srgbClr val="000000"/>
                 </a:solidFill>
@@ -7371,14 +7371,14 @@
           <a:noFill/>
           <a:extLst>
             <a:ext uri="{909E8E84-426E-40dd-AFC4-6F175D3DCCD1}">
-              <a14:hiddenFill xmlns="" xmlns:a14="http://schemas.microsoft.com/office/drawing/2010/main">
+              <a14:hiddenFill xmlns:a14="http://schemas.microsoft.com/office/drawing/2010/main" xmlns="">
                 <a:solidFill>
                   <a:srgbClr val="FFFFFF"/>
                 </a:solidFill>
               </a14:hiddenFill>
             </a:ext>
             <a:ext uri="{91240B29-F687-4f45-9708-019B960494DF}">
-              <a14:hiddenLine xmlns="" xmlns:a14="http://schemas.microsoft.com/office/drawing/2010/main" w="9525">
+              <a14:hiddenLine xmlns:a14="http://schemas.microsoft.com/office/drawing/2010/main" xmlns="" w="9525">
                 <a:solidFill>
                   <a:srgbClr val="000000"/>
                 </a:solidFill>
@@ -7558,14 +7558,14 @@
           <a:noFill/>
           <a:extLst>
             <a:ext uri="{909E8E84-426E-40dd-AFC4-6F175D3DCCD1}">
-              <a14:hiddenFill xmlns="" xmlns:a14="http://schemas.microsoft.com/office/drawing/2010/main">
+              <a14:hiddenFill xmlns:a14="http://schemas.microsoft.com/office/drawing/2010/main" xmlns="">
                 <a:solidFill>
                   <a:srgbClr val="FFFFFF"/>
                 </a:solidFill>
               </a14:hiddenFill>
             </a:ext>
             <a:ext uri="{91240B29-F687-4f45-9708-019B960494DF}">
-              <a14:hiddenLine xmlns="" xmlns:a14="http://schemas.microsoft.com/office/drawing/2010/main" w="9525">
+              <a14:hiddenLine xmlns:a14="http://schemas.microsoft.com/office/drawing/2010/main" xmlns="" w="9525">
                 <a:solidFill>
                   <a:srgbClr val="000000"/>
                 </a:solidFill>
@@ -7575,7 +7575,7 @@
               </a14:hiddenLine>
             </a:ext>
             <a:ext uri="{AF507438-7753-43e0-B8FC-AC1667EBCBE1}">
-              <a14:hiddenEffects xmlns="" xmlns:a14="http://schemas.microsoft.com/office/drawing/2010/main">
+              <a14:hiddenEffects xmlns:a14="http://schemas.microsoft.com/office/drawing/2010/main" xmlns="">
                 <a:effectLst>
                   <a:outerShdw dist="35921" dir="2700000" algn="ctr" rotWithShape="0">
                     <a:srgbClr val="808080"/>
@@ -7584,7 +7584,7 @@
               </a14:hiddenEffects>
             </a:ext>
             <a:ext uri="{53640926-AAD7-44d8-BBD7-CCE9431645EC}">
-              <a14:shadowObscured xmlns="" xmlns:a14="http://schemas.microsoft.com/office/drawing/2010/main" val="1"/>
+              <a14:shadowObscured xmlns:a14="http://schemas.microsoft.com/office/drawing/2010/main" xmlns="" val="1"/>
             </a:ext>
           </a:extLst>
         </p:spPr>
@@ -7797,7 +7797,7 @@
           <a:p>
             <a:fld id="{C764DE79-268F-4C1A-8933-263129D2AF90}" type="datetimeFigureOut">
               <a:rPr lang="en-US" smtClean="0"/>
-              <a:t>9/20/25</a:t>
+              <a:t>10/16/25</a:t>
             </a:fld>
             <a:endParaRPr lang="en-US"/>
           </a:p>
@@ -7968,7 +7968,7 @@
           <a:p>
             <a:fld id="{C764DE79-268F-4C1A-8933-263129D2AF90}" type="datetimeFigureOut">
               <a:rPr lang="en-US" smtClean="0"/>
-              <a:t>9/20/25</a:t>
+              <a:t>10/16/25</a:t>
             </a:fld>
             <a:endParaRPr lang="en-US"/>
           </a:p>
@@ -8149,7 +8149,7 @@
           <a:p>
             <a:fld id="{C764DE79-268F-4C1A-8933-263129D2AF90}" type="datetimeFigureOut">
               <a:rPr lang="en-US" smtClean="0"/>
-              <a:t>9/20/25</a:t>
+              <a:t>10/16/25</a:t>
             </a:fld>
             <a:endParaRPr lang="en-US"/>
           </a:p>
@@ -8990,7 +8990,7 @@
           <a:p>
             <a:fld id="{C764DE79-268F-4C1A-8933-263129D2AF90}" type="datetimeFigureOut">
               <a:rPr lang="en-US" smtClean="0"/>
-              <a:t>9/20/25</a:t>
+              <a:t>10/16/25</a:t>
             </a:fld>
             <a:endParaRPr lang="en-US"/>
           </a:p>
@@ -9362,7 +9362,7 @@
           <a:p>
             <a:fld id="{C764DE79-268F-4C1A-8933-263129D2AF90}" type="datetimeFigureOut">
               <a:rPr lang="en-US" smtClean="0"/>
-              <a:t>9/20/25</a:t>
+              <a:t>10/16/25</a:t>
             </a:fld>
             <a:endParaRPr lang="en-US"/>
           </a:p>
@@ -9662,7 +9662,7 @@
           <a:p>
             <a:fld id="{C764DE79-268F-4C1A-8933-263129D2AF90}" type="datetimeFigureOut">
               <a:rPr lang="en-US" smtClean="0"/>
-              <a:t>9/20/25</a:t>
+              <a:t>10/16/25</a:t>
             </a:fld>
             <a:endParaRPr lang="en-US"/>
           </a:p>
@@ -10209,7 +10209,7 @@
           <a:p>
             <a:fld id="{C764DE79-268F-4C1A-8933-263129D2AF90}" type="datetimeFigureOut">
               <a:rPr lang="en-US" smtClean="0"/>
-              <a:t>9/20/25</a:t>
+              <a:t>10/16/25</a:t>
             </a:fld>
             <a:endParaRPr lang="en-US"/>
           </a:p>
@@ -10415,7 +10415,7 @@
           <a:p>
             <a:fld id="{C764DE79-268F-4C1A-8933-263129D2AF90}" type="datetimeFigureOut">
               <a:rPr lang="en-US" smtClean="0"/>
-              <a:t>9/20/25</a:t>
+              <a:t>10/16/25</a:t>
             </a:fld>
             <a:endParaRPr lang="en-US"/>
           </a:p>
@@ -10627,7 +10627,7 @@
           <a:p>
             <a:fld id="{C764DE79-268F-4C1A-8933-263129D2AF90}" type="datetimeFigureOut">
               <a:rPr lang="en-US" smtClean="0"/>
-              <a:t>9/20/25</a:t>
+              <a:t>10/16/25</a:t>
             </a:fld>
             <a:endParaRPr lang="en-US"/>
           </a:p>
@@ -10904,7 +10904,7 @@
           <a:p>
             <a:fld id="{C764DE79-268F-4C1A-8933-263129D2AF90}" type="datetimeFigureOut">
               <a:rPr lang="en-US" smtClean="0"/>
-              <a:t>9/20/25</a:t>
+              <a:t>10/16/25</a:t>
             </a:fld>
             <a:endParaRPr lang="en-US"/>
           </a:p>
@@ -11162,7 +11162,7 @@
           <a:p>
             <a:fld id="{C764DE79-268F-4C1A-8933-263129D2AF90}" type="datetimeFigureOut">
               <a:rPr lang="en-US" smtClean="0"/>
-              <a:t>9/20/25</a:t>
+              <a:t>10/16/25</a:t>
             </a:fld>
             <a:endParaRPr lang="en-US"/>
           </a:p>
@@ -11381,7 +11381,7 @@
           <a:p>
             <a:fld id="{C764DE79-268F-4C1A-8933-263129D2AF90}" type="datetimeFigureOut">
               <a:rPr lang="en-US" smtClean="0"/>
-              <a:t>9/20/25</a:t>
+              <a:t>10/16/25</a:t>
             </a:fld>
             <a:endParaRPr lang="en-US"/>
           </a:p>
@@ -11852,14 +11852,14 @@
           </a:ln>
           <a:extLst>
             <a:ext uri="{909E8E84-426E-40dd-AFC4-6F175D3DCCD1}">
-              <a14:hiddenFill xmlns="" xmlns:a14="http://schemas.microsoft.com/office/drawing/2010/main">
+              <a14:hiddenFill xmlns:a14="http://schemas.microsoft.com/office/drawing/2010/main" xmlns="">
                 <a:solidFill>
                   <a:srgbClr val="FFFFFF"/>
                 </a:solidFill>
               </a14:hiddenFill>
             </a:ext>
             <a:ext uri="{91240B29-F687-4f45-9708-019B960494DF}">
-              <a14:hiddenLine xmlns="" xmlns:a14="http://schemas.microsoft.com/office/drawing/2010/main" w="9525">
+              <a14:hiddenLine xmlns:a14="http://schemas.microsoft.com/office/drawing/2010/main" xmlns="" w="9525">
                 <a:solidFill>
                   <a:srgbClr val="000000"/>
                 </a:solidFill>
@@ -12296,42 +12296,6 @@
           </a:p>
         </p:txBody>
       </p:sp>
-      <p:pic>
-        <p:nvPicPr>
-          <p:cNvPr id="4" name="Picture 3" descr="Text&#10;&#10;Description automatically generated">
-            <a:extLst>
-              <a:ext uri="{FF2B5EF4-FFF2-40B4-BE49-F238E27FC236}">
-                <a16:creationId xmlns:a16="http://schemas.microsoft.com/office/drawing/2014/main" id="{3C52B6A4-97C1-5BF3-8F44-19C73FB40166}"/>
-              </a:ext>
-            </a:extLst>
-          </p:cNvPr>
-          <p:cNvPicPr>
-            <a:picLocks noChangeAspect="1"/>
-          </p:cNvPicPr>
-          <p:nvPr/>
-        </p:nvPicPr>
-        <p:blipFill>
-          <a:blip r:embed="rId3" cstate="print">
-            <a:extLst>
-              <a:ext uri="{28A0092B-C50C-407E-A947-70E740481C1C}">
-                <a14:useLocalDpi xmlns:a14="http://schemas.microsoft.com/office/drawing/2010/main" val="0"/>
-              </a:ext>
-            </a:extLst>
-          </a:blip>
-          <a:stretch>
-            <a:fillRect/>
-          </a:stretch>
-        </p:blipFill>
-        <p:spPr>
-          <a:xfrm>
-            <a:off x="651641" y="5501441"/>
-            <a:ext cx="2286000" cy="1281546"/>
-          </a:xfrm>
-          <a:prstGeom prst="rect">
-            <a:avLst/>
-          </a:prstGeom>
-        </p:spPr>
-      </p:pic>
       <p:sp>
         <p:nvSpPr>
           <p:cNvPr id="5" name="TextBox 4">
@@ -12402,7 +12366,7 @@
           <p:nvPr/>
         </p:nvPicPr>
         <p:blipFill>
-          <a:blip r:embed="rId4">
+          <a:blip r:embed="rId3">
             <a:extLst>
               <a:ext uri="{28A0092B-C50C-407E-A947-70E740481C1C}">
                 <a14:useLocalDpi xmlns:a14="http://schemas.microsoft.com/office/drawing/2010/main" val="0"/>
@@ -12432,6 +12396,42 @@
               </a14:hiddenFill>
             </a:ext>
           </a:extLst>
+        </p:spPr>
+      </p:pic>
+      <p:pic>
+        <p:nvPicPr>
+          <p:cNvPr id="7" name="Picture 6">
+            <a:extLst>
+              <a:ext uri="{FF2B5EF4-FFF2-40B4-BE49-F238E27FC236}">
+                <a16:creationId xmlns:a16="http://schemas.microsoft.com/office/drawing/2014/main" id="{0760E8F1-B4D3-8DAE-B911-C719A1B1D15E}"/>
+              </a:ext>
+            </a:extLst>
+          </p:cNvPr>
+          <p:cNvPicPr>
+            <a:picLocks noChangeAspect="1"/>
+          </p:cNvPicPr>
+          <p:nvPr/>
+        </p:nvPicPr>
+        <p:blipFill>
+          <a:blip r:embed="rId4" cstate="print">
+            <a:extLst>
+              <a:ext uri="{28A0092B-C50C-407E-A947-70E740481C1C}">
+                <a14:useLocalDpi xmlns:a14="http://schemas.microsoft.com/office/drawing/2010/main" val="0"/>
+              </a:ext>
+            </a:extLst>
+          </a:blip>
+          <a:stretch>
+            <a:fillRect/>
+          </a:stretch>
+        </p:blipFill>
+        <p:spPr>
+          <a:xfrm>
+            <a:off x="499242" y="5565517"/>
+            <a:ext cx="2057400" cy="1153391"/>
+          </a:xfrm>
+          <a:prstGeom prst="rect">
+            <a:avLst/>
+          </a:prstGeom>
         </p:spPr>
       </p:pic>
     </p:spTree>
@@ -13278,14 +13278,14 @@
           </a:ln>
           <a:extLst>
             <a:ext uri="{909E8E84-426E-40dd-AFC4-6F175D3DCCD1}">
-              <a14:hiddenFill xmlns="" xmlns:a14="http://schemas.microsoft.com/office/drawing/2010/main">
+              <a14:hiddenFill xmlns:a14="http://schemas.microsoft.com/office/drawing/2010/main" xmlns="">
                 <a:solidFill>
                   <a:srgbClr val="FFFFFF"/>
                 </a:solidFill>
               </a14:hiddenFill>
             </a:ext>
             <a:ext uri="{91240B29-F687-4f45-9708-019B960494DF}">
-              <a14:hiddenLine xmlns="" xmlns:a14="http://schemas.microsoft.com/office/drawing/2010/main" w="9525">
+              <a14:hiddenLine xmlns:a14="http://schemas.microsoft.com/office/drawing/2010/main" xmlns="" w="9525">
                 <a:solidFill>
                   <a:srgbClr val="000000"/>
                 </a:solidFill>
@@ -13497,14 +13497,14 @@
           </a:ln>
           <a:extLst>
             <a:ext uri="{909E8E84-426E-40dd-AFC4-6F175D3DCCD1}">
-              <a14:hiddenFill xmlns="" xmlns:a14="http://schemas.microsoft.com/office/drawing/2010/main">
+              <a14:hiddenFill xmlns:a14="http://schemas.microsoft.com/office/drawing/2010/main" xmlns="">
                 <a:solidFill>
                   <a:srgbClr val="FFFFFF"/>
                 </a:solidFill>
               </a14:hiddenFill>
             </a:ext>
             <a:ext uri="{91240B29-F687-4f45-9708-019B960494DF}">
-              <a14:hiddenLine xmlns="" xmlns:a14="http://schemas.microsoft.com/office/drawing/2010/main" w="9525">
+              <a14:hiddenLine xmlns:a14="http://schemas.microsoft.com/office/drawing/2010/main" xmlns="" w="9525">
                 <a:solidFill>
                   <a:srgbClr val="000000"/>
                 </a:solidFill>
@@ -14446,14 +14446,14 @@
           </a:ln>
           <a:extLst>
             <a:ext uri="{909E8E84-426E-40dd-AFC4-6F175D3DCCD1}">
-              <a14:hiddenFill xmlns="" xmlns:a14="http://schemas.microsoft.com/office/drawing/2010/main">
+              <a14:hiddenFill xmlns:a14="http://schemas.microsoft.com/office/drawing/2010/main" xmlns="">
                 <a:solidFill>
                   <a:srgbClr val="FFFFFF"/>
                 </a:solidFill>
               </a14:hiddenFill>
             </a:ext>
             <a:ext uri="{91240B29-F687-4f45-9708-019B960494DF}">
-              <a14:hiddenLine xmlns="" xmlns:a14="http://schemas.microsoft.com/office/drawing/2010/main" w="9525">
+              <a14:hiddenLine xmlns:a14="http://schemas.microsoft.com/office/drawing/2010/main" xmlns="" w="9525">
                 <a:solidFill>
                   <a:srgbClr val="000000"/>
                 </a:solidFill>
@@ -14763,14 +14763,14 @@
           </a:ln>
           <a:extLst>
             <a:ext uri="{909E8E84-426E-40dd-AFC4-6F175D3DCCD1}">
-              <a14:hiddenFill xmlns="" xmlns:a14="http://schemas.microsoft.com/office/drawing/2010/main">
+              <a14:hiddenFill xmlns:a14="http://schemas.microsoft.com/office/drawing/2010/main" xmlns="">
                 <a:solidFill>
                   <a:srgbClr val="FFFFFF"/>
                 </a:solidFill>
               </a14:hiddenFill>
             </a:ext>
             <a:ext uri="{91240B29-F687-4f45-9708-019B960494DF}">
-              <a14:hiddenLine xmlns="" xmlns:a14="http://schemas.microsoft.com/office/drawing/2010/main" w="9525">
+              <a14:hiddenLine xmlns:a14="http://schemas.microsoft.com/office/drawing/2010/main" xmlns="" w="9525">
                 <a:solidFill>
                   <a:srgbClr val="000000"/>
                 </a:solidFill>
@@ -14986,14 +14986,14 @@
           </a:ln>
           <a:extLst>
             <a:ext uri="{909E8E84-426E-40dd-AFC4-6F175D3DCCD1}">
-              <a14:hiddenFill xmlns="" xmlns:a14="http://schemas.microsoft.com/office/drawing/2010/main">
+              <a14:hiddenFill xmlns:a14="http://schemas.microsoft.com/office/drawing/2010/main" xmlns="">
                 <a:solidFill>
                   <a:srgbClr val="FFFFFF"/>
                 </a:solidFill>
               </a14:hiddenFill>
             </a:ext>
             <a:ext uri="{91240B29-F687-4f45-9708-019B960494DF}">
-              <a14:hiddenLine xmlns="" xmlns:a14="http://schemas.microsoft.com/office/drawing/2010/main" w="9525">
+              <a14:hiddenLine xmlns:a14="http://schemas.microsoft.com/office/drawing/2010/main" xmlns="" w="9525">
                 <a:solidFill>
                   <a:srgbClr val="000000"/>
                 </a:solidFill>
@@ -15209,14 +15209,14 @@
           </a:ln>
           <a:extLst>
             <a:ext uri="{909E8E84-426E-40dd-AFC4-6F175D3DCCD1}">
-              <a14:hiddenFill xmlns="" xmlns:a14="http://schemas.microsoft.com/office/drawing/2010/main">
+              <a14:hiddenFill xmlns:a14="http://schemas.microsoft.com/office/drawing/2010/main" xmlns="">
                 <a:solidFill>
                   <a:srgbClr val="FFFFFF"/>
                 </a:solidFill>
               </a14:hiddenFill>
             </a:ext>
             <a:ext uri="{91240B29-F687-4f45-9708-019B960494DF}">
-              <a14:hiddenLine xmlns="" xmlns:a14="http://schemas.microsoft.com/office/drawing/2010/main" w="9525">
+              <a14:hiddenLine xmlns:a14="http://schemas.microsoft.com/office/drawing/2010/main" xmlns="" w="9525">
                 <a:solidFill>
                   <a:srgbClr val="000000"/>
                 </a:solidFill>
@@ -15437,7 +15437,7 @@
           </a:ln>
           <a:extLst>
             <a:ext uri="{909E8E84-426E-40dd-AFC4-6F175D3DCCD1}">
-              <a14:hiddenFill xmlns="" xmlns:a14="http://schemas.microsoft.com/office/drawing/2010/main">
+              <a14:hiddenFill xmlns:a14="http://schemas.microsoft.com/office/drawing/2010/main" xmlns="">
                 <a:noFill/>
               </a14:hiddenFill>
             </a:ext>
@@ -15478,7 +15478,7 @@
           </a:ln>
           <a:extLst>
             <a:ext uri="{909E8E84-426E-40dd-AFC4-6F175D3DCCD1}">
-              <a14:hiddenFill xmlns="" xmlns:a14="http://schemas.microsoft.com/office/drawing/2010/main">
+              <a14:hiddenFill xmlns:a14="http://schemas.microsoft.com/office/drawing/2010/main" xmlns="">
                 <a:noFill/>
               </a14:hiddenFill>
             </a:ext>
@@ -15519,7 +15519,7 @@
           </a:ln>
           <a:extLst>
             <a:ext uri="{909E8E84-426E-40dd-AFC4-6F175D3DCCD1}">
-              <a14:hiddenFill xmlns="" xmlns:a14="http://schemas.microsoft.com/office/drawing/2010/main">
+              <a14:hiddenFill xmlns:a14="http://schemas.microsoft.com/office/drawing/2010/main" xmlns="">
                 <a:noFill/>
               </a14:hiddenFill>
             </a:ext>
@@ -15555,14 +15555,14 @@
           </a:ln>
           <a:extLst>
             <a:ext uri="{909E8E84-426E-40dd-AFC4-6F175D3DCCD1}">
-              <a14:hiddenFill xmlns="" xmlns:a14="http://schemas.microsoft.com/office/drawing/2010/main">
+              <a14:hiddenFill xmlns:a14="http://schemas.microsoft.com/office/drawing/2010/main" xmlns="">
                 <a:solidFill>
                   <a:srgbClr val="FFFFFF"/>
                 </a:solidFill>
               </a14:hiddenFill>
             </a:ext>
             <a:ext uri="{91240B29-F687-4f45-9708-019B960494DF}">
-              <a14:hiddenLine xmlns="" xmlns:a14="http://schemas.microsoft.com/office/drawing/2010/main" w="9525">
+              <a14:hiddenLine xmlns:a14="http://schemas.microsoft.com/office/drawing/2010/main" xmlns="" w="9525">
                 <a:solidFill>
                   <a:srgbClr val="000000"/>
                 </a:solidFill>
@@ -15783,7 +15783,7 @@
           </a:ln>
           <a:extLst>
             <a:ext uri="{909E8E84-426E-40dd-AFC4-6F175D3DCCD1}">
-              <a14:hiddenFill xmlns="" xmlns:a14="http://schemas.microsoft.com/office/drawing/2010/main">
+              <a14:hiddenFill xmlns:a14="http://schemas.microsoft.com/office/drawing/2010/main" xmlns="">
                 <a:noFill/>
               </a14:hiddenFill>
             </a:ext>
@@ -15819,14 +15819,14 @@
           </a:ln>
           <a:extLst>
             <a:ext uri="{909E8E84-426E-40dd-AFC4-6F175D3DCCD1}">
-              <a14:hiddenFill xmlns="" xmlns:a14="http://schemas.microsoft.com/office/drawing/2010/main">
+              <a14:hiddenFill xmlns:a14="http://schemas.microsoft.com/office/drawing/2010/main" xmlns="">
                 <a:solidFill>
                   <a:srgbClr val="FFFFFF"/>
                 </a:solidFill>
               </a14:hiddenFill>
             </a:ext>
             <a:ext uri="{91240B29-F687-4f45-9708-019B960494DF}">
-              <a14:hiddenLine xmlns="" xmlns:a14="http://schemas.microsoft.com/office/drawing/2010/main" w="9525">
+              <a14:hiddenLine xmlns:a14="http://schemas.microsoft.com/office/drawing/2010/main" xmlns="" w="9525">
                 <a:solidFill>
                   <a:srgbClr val="000000"/>
                 </a:solidFill>
@@ -16047,7 +16047,7 @@
           </a:ln>
           <a:extLst>
             <a:ext uri="{909E8E84-426E-40dd-AFC4-6F175D3DCCD1}">
-              <a14:hiddenFill xmlns="" xmlns:a14="http://schemas.microsoft.com/office/drawing/2010/main">
+              <a14:hiddenFill xmlns:a14="http://schemas.microsoft.com/office/drawing/2010/main" xmlns="">
                 <a:noFill/>
               </a14:hiddenFill>
             </a:ext>
@@ -16083,14 +16083,14 @@
           </a:ln>
           <a:extLst>
             <a:ext uri="{909E8E84-426E-40dd-AFC4-6F175D3DCCD1}">
-              <a14:hiddenFill xmlns="" xmlns:a14="http://schemas.microsoft.com/office/drawing/2010/main">
+              <a14:hiddenFill xmlns:a14="http://schemas.microsoft.com/office/drawing/2010/main" xmlns="">
                 <a:solidFill>
                   <a:srgbClr val="FFFFFF"/>
                 </a:solidFill>
               </a14:hiddenFill>
             </a:ext>
             <a:ext uri="{91240B29-F687-4f45-9708-019B960494DF}">
-              <a14:hiddenLine xmlns="" xmlns:a14="http://schemas.microsoft.com/office/drawing/2010/main" w="9525">
+              <a14:hiddenLine xmlns:a14="http://schemas.microsoft.com/office/drawing/2010/main" xmlns="" w="9525">
                 <a:solidFill>
                   <a:srgbClr val="000000"/>
                 </a:solidFill>
@@ -16311,7 +16311,7 @@
           </a:ln>
           <a:extLst>
             <a:ext uri="{909E8E84-426E-40dd-AFC4-6F175D3DCCD1}">
-              <a14:hiddenFill xmlns="" xmlns:a14="http://schemas.microsoft.com/office/drawing/2010/main">
+              <a14:hiddenFill xmlns:a14="http://schemas.microsoft.com/office/drawing/2010/main" xmlns="">
                 <a:noFill/>
               </a14:hiddenFill>
             </a:ext>
@@ -16353,14 +16353,14 @@
           </a:ln>
           <a:extLst>
             <a:ext uri="{909E8E84-426E-40dd-AFC4-6F175D3DCCD1}">
-              <a14:hiddenFill xmlns="" xmlns:a14="http://schemas.microsoft.com/office/drawing/2010/main">
+              <a14:hiddenFill xmlns:a14="http://schemas.microsoft.com/office/drawing/2010/main" xmlns="">
                 <a:solidFill>
                   <a:srgbClr val="FFFFFF"/>
                 </a:solidFill>
               </a14:hiddenFill>
             </a:ext>
             <a:ext uri="{91240B29-F687-4f45-9708-019B960494DF}">
-              <a14:hiddenLine xmlns="" xmlns:a14="http://schemas.microsoft.com/office/drawing/2010/main" w="9525">
+              <a14:hiddenLine xmlns:a14="http://schemas.microsoft.com/office/drawing/2010/main" xmlns="" w="9525">
                 <a:solidFill>
                   <a:srgbClr val="000000"/>
                 </a:solidFill>
@@ -18353,7 +18353,7 @@
           </a:ln>
           <a:extLst>
             <a:ext uri="{909E8E84-426E-40dd-AFC4-6F175D3DCCD1}">
-              <a14:hiddenFill xmlns="" xmlns:a14="http://schemas.microsoft.com/office/drawing/2010/main">
+              <a14:hiddenFill xmlns:a14="http://schemas.microsoft.com/office/drawing/2010/main" xmlns="">
                 <a:solidFill>
                   <a:srgbClr val="FFFFFF"/>
                 </a:solidFill>
@@ -20292,14 +20292,14 @@
           </a:ln>
           <a:extLst>
             <a:ext uri="{909E8E84-426E-40dd-AFC4-6F175D3DCCD1}">
-              <a14:hiddenFill xmlns="" xmlns:a14="http://schemas.microsoft.com/office/drawing/2010/main">
+              <a14:hiddenFill xmlns:a14="http://schemas.microsoft.com/office/drawing/2010/main" xmlns="">
                 <a:solidFill>
                   <a:srgbClr val="FFFFFF"/>
                 </a:solidFill>
               </a14:hiddenFill>
             </a:ext>
             <a:ext uri="{91240B29-F687-4f45-9708-019B960494DF}">
-              <a14:hiddenLine xmlns="" xmlns:a14="http://schemas.microsoft.com/office/drawing/2010/main" w="9525">
+              <a14:hiddenLine xmlns:a14="http://schemas.microsoft.com/office/drawing/2010/main" xmlns="" w="9525">
                 <a:solidFill>
                   <a:srgbClr val="000000"/>
                 </a:solidFill>
@@ -21350,14 +21350,14 @@
             </a:ln>
             <a:extLst>
               <a:ext uri="{909E8E84-426E-40dd-AFC4-6F175D3DCCD1}">
-                <a14:hiddenFill xmlns="" xmlns:a14="http://schemas.microsoft.com/office/drawing/2010/main">
+                <a14:hiddenFill xmlns:a14="http://schemas.microsoft.com/office/drawing/2010/main" xmlns="">
                   <a:solidFill>
                     <a:srgbClr val="FFFFFF"/>
                   </a:solidFill>
                 </a14:hiddenFill>
               </a:ext>
               <a:ext uri="{91240B29-F687-4f45-9708-019B960494DF}">
-                <a14:hiddenLine xmlns="" xmlns:a14="http://schemas.microsoft.com/office/drawing/2010/main" w="9525">
+                <a14:hiddenLine xmlns:a14="http://schemas.microsoft.com/office/drawing/2010/main" xmlns="" w="9525">
                   <a:solidFill>
                     <a:schemeClr val="tx1"/>
                   </a:solidFill>
@@ -21588,14 +21588,14 @@
             </a:ln>
             <a:extLst>
               <a:ext uri="{909E8E84-426E-40dd-AFC4-6F175D3DCCD1}">
-                <a14:hiddenFill xmlns="" xmlns:a14="http://schemas.microsoft.com/office/drawing/2010/main">
+                <a14:hiddenFill xmlns:a14="http://schemas.microsoft.com/office/drawing/2010/main" xmlns="">
                   <a:solidFill>
                     <a:srgbClr val="FFFFFF"/>
                   </a:solidFill>
                 </a14:hiddenFill>
               </a:ext>
               <a:ext uri="{91240B29-F687-4f45-9708-019B960494DF}">
-                <a14:hiddenLine xmlns="" xmlns:a14="http://schemas.microsoft.com/office/drawing/2010/main" w="25400">
+                <a14:hiddenLine xmlns:a14="http://schemas.microsoft.com/office/drawing/2010/main" xmlns="" w="25400">
                   <a:solidFill>
                     <a:srgbClr val="FFFFFF"/>
                   </a:solidFill>
@@ -21636,14 +21636,14 @@
           </a:ln>
           <a:extLst>
             <a:ext uri="{909E8E84-426E-40dd-AFC4-6F175D3DCCD1}">
-              <a14:hiddenFill xmlns="" xmlns:a14="http://schemas.microsoft.com/office/drawing/2010/main">
+              <a14:hiddenFill xmlns:a14="http://schemas.microsoft.com/office/drawing/2010/main" xmlns="">
                 <a:solidFill>
                   <a:srgbClr val="FFFFFF"/>
                 </a:solidFill>
               </a14:hiddenFill>
             </a:ext>
             <a:ext uri="{91240B29-F687-4f45-9708-019B960494DF}">
-              <a14:hiddenLine xmlns="" xmlns:a14="http://schemas.microsoft.com/office/drawing/2010/main" w="9525">
+              <a14:hiddenLine xmlns:a14="http://schemas.microsoft.com/office/drawing/2010/main" xmlns="" w="9525">
                 <a:solidFill>
                   <a:schemeClr val="tx1"/>
                 </a:solidFill>
@@ -21880,14 +21880,14 @@
           </a:ln>
           <a:extLst>
             <a:ext uri="{909E8E84-426E-40dd-AFC4-6F175D3DCCD1}">
-              <a14:hiddenFill xmlns="" xmlns:a14="http://schemas.microsoft.com/office/drawing/2010/main">
+              <a14:hiddenFill xmlns:a14="http://schemas.microsoft.com/office/drawing/2010/main" xmlns="">
                 <a:solidFill>
                   <a:srgbClr val="FFFFFF"/>
                 </a:solidFill>
               </a14:hiddenFill>
             </a:ext>
             <a:ext uri="{91240B29-F687-4f45-9708-019B960494DF}">
-              <a14:hiddenLine xmlns="" xmlns:a14="http://schemas.microsoft.com/office/drawing/2010/main" w="25400">
+              <a14:hiddenLine xmlns:a14="http://schemas.microsoft.com/office/drawing/2010/main" xmlns="" w="25400">
                 <a:solidFill>
                   <a:srgbClr val="FFFFFF"/>
                 </a:solidFill>
@@ -22810,14 +22810,14 @@
           </a:ln>
           <a:extLst>
             <a:ext uri="{909E8E84-426E-40dd-AFC4-6F175D3DCCD1}">
-              <a14:hiddenFill xmlns="" xmlns:a14="http://schemas.microsoft.com/office/drawing/2010/main">
+              <a14:hiddenFill xmlns:a14="http://schemas.microsoft.com/office/drawing/2010/main" xmlns="">
                 <a:solidFill>
                   <a:srgbClr val="FFFFFF"/>
                 </a:solidFill>
               </a14:hiddenFill>
             </a:ext>
             <a:ext uri="{91240B29-F687-4f45-9708-019B960494DF}">
-              <a14:hiddenLine xmlns="" xmlns:a14="http://schemas.microsoft.com/office/drawing/2010/main" w="9525">
+              <a14:hiddenLine xmlns:a14="http://schemas.microsoft.com/office/drawing/2010/main" xmlns="" w="9525">
                 <a:solidFill>
                   <a:schemeClr val="tx1"/>
                 </a:solidFill>
@@ -23035,14 +23035,14 @@
           </a:ln>
           <a:extLst>
             <a:ext uri="{909E8E84-426E-40dd-AFC4-6F175D3DCCD1}">
-              <a14:hiddenFill xmlns="" xmlns:a14="http://schemas.microsoft.com/office/drawing/2010/main">
+              <a14:hiddenFill xmlns:a14="http://schemas.microsoft.com/office/drawing/2010/main" xmlns="">
                 <a:solidFill>
                   <a:srgbClr val="FFFFFF"/>
                 </a:solidFill>
               </a14:hiddenFill>
             </a:ext>
             <a:ext uri="{91240B29-F687-4f45-9708-019B960494DF}">
-              <a14:hiddenLine xmlns="" xmlns:a14="http://schemas.microsoft.com/office/drawing/2010/main" w="9525">
+              <a14:hiddenLine xmlns:a14="http://schemas.microsoft.com/office/drawing/2010/main" xmlns="" w="9525">
                 <a:solidFill>
                   <a:schemeClr val="tx1"/>
                 </a:solidFill>
@@ -26138,14 +26138,14 @@
           <a:noFill/>
           <a:extLst>
             <a:ext uri="{909E8E84-426E-40dd-AFC4-6F175D3DCCD1}">
-              <a14:hiddenFill xmlns="" xmlns:a14="http://schemas.microsoft.com/office/drawing/2010/main">
+              <a14:hiddenFill xmlns:a14="http://schemas.microsoft.com/office/drawing/2010/main" xmlns="">
                 <a:solidFill>
                   <a:srgbClr val="FFFFFF"/>
                 </a:solidFill>
               </a14:hiddenFill>
             </a:ext>
             <a:ext uri="{91240B29-F687-4f45-9708-019B960494DF}">
-              <a14:hiddenLine xmlns="" xmlns:a14="http://schemas.microsoft.com/office/drawing/2010/main" w="9525">
+              <a14:hiddenLine xmlns:a14="http://schemas.microsoft.com/office/drawing/2010/main" xmlns="" w="9525">
                 <a:solidFill>
                   <a:srgbClr val="000000"/>
                 </a:solidFill>
@@ -26357,14 +26357,14 @@
           </a:ln>
           <a:extLst>
             <a:ext uri="{909E8E84-426E-40dd-AFC4-6F175D3DCCD1}">
-              <a14:hiddenFill xmlns="" xmlns:a14="http://schemas.microsoft.com/office/drawing/2010/main">
+              <a14:hiddenFill xmlns:a14="http://schemas.microsoft.com/office/drawing/2010/main" xmlns="">
                 <a:solidFill>
                   <a:srgbClr val="FFFFFF"/>
                 </a:solidFill>
               </a14:hiddenFill>
             </a:ext>
             <a:ext uri="{91240B29-F687-4f45-9708-019B960494DF}">
-              <a14:hiddenLine xmlns="" xmlns:a14="http://schemas.microsoft.com/office/drawing/2010/main" w="9525">
+              <a14:hiddenLine xmlns:a14="http://schemas.microsoft.com/office/drawing/2010/main" xmlns="" w="9525">
                 <a:solidFill>
                   <a:srgbClr val="000000"/>
                 </a:solidFill>
@@ -26656,14 +26656,14 @@
           </a:ln>
           <a:extLst>
             <a:ext uri="{909E8E84-426E-40dd-AFC4-6F175D3DCCD1}">
-              <a14:hiddenFill xmlns="" xmlns:a14="http://schemas.microsoft.com/office/drawing/2010/main">
+              <a14:hiddenFill xmlns:a14="http://schemas.microsoft.com/office/drawing/2010/main" xmlns="">
                 <a:solidFill>
                   <a:srgbClr val="FFFFFF"/>
                 </a:solidFill>
               </a14:hiddenFill>
             </a:ext>
             <a:ext uri="{91240B29-F687-4f45-9708-019B960494DF}">
-              <a14:hiddenLine xmlns="" xmlns:a14="http://schemas.microsoft.com/office/drawing/2010/main" w="9525">
+              <a14:hiddenLine xmlns:a14="http://schemas.microsoft.com/office/drawing/2010/main" xmlns="" w="9525">
                 <a:solidFill>
                   <a:srgbClr val="000000"/>
                 </a:solidFill>
@@ -26901,14 +26901,14 @@
           </a:ln>
           <a:extLst>
             <a:ext uri="{909E8E84-426E-40dd-AFC4-6F175D3DCCD1}">
-              <a14:hiddenFill xmlns="" xmlns:a14="http://schemas.microsoft.com/office/drawing/2010/main">
+              <a14:hiddenFill xmlns:a14="http://schemas.microsoft.com/office/drawing/2010/main" xmlns="">
                 <a:solidFill>
                   <a:srgbClr val="FFFFFF"/>
                 </a:solidFill>
               </a14:hiddenFill>
             </a:ext>
             <a:ext uri="{91240B29-F687-4f45-9708-019B960494DF}">
-              <a14:hiddenLine xmlns="" xmlns:a14="http://schemas.microsoft.com/office/drawing/2010/main" w="9525">
+              <a14:hiddenLine xmlns:a14="http://schemas.microsoft.com/office/drawing/2010/main" xmlns="" w="9525">
                 <a:solidFill>
                   <a:srgbClr val="000000"/>
                 </a:solidFill>
@@ -27124,14 +27124,14 @@
           </a:ln>
           <a:extLst>
             <a:ext uri="{909E8E84-426E-40dd-AFC4-6F175D3DCCD1}">
-              <a14:hiddenFill xmlns="" xmlns:a14="http://schemas.microsoft.com/office/drawing/2010/main">
+              <a14:hiddenFill xmlns:a14="http://schemas.microsoft.com/office/drawing/2010/main" xmlns="">
                 <a:solidFill>
                   <a:srgbClr val="FFFFFF"/>
                 </a:solidFill>
               </a14:hiddenFill>
             </a:ext>
             <a:ext uri="{91240B29-F687-4f45-9708-019B960494DF}">
-              <a14:hiddenLine xmlns="" xmlns:a14="http://schemas.microsoft.com/office/drawing/2010/main" w="9525">
+              <a14:hiddenLine xmlns:a14="http://schemas.microsoft.com/office/drawing/2010/main" xmlns="" w="9525">
                 <a:solidFill>
                   <a:srgbClr val="000000"/>
                 </a:solidFill>
@@ -27352,7 +27352,7 @@
           </a:ln>
           <a:extLst>
             <a:ext uri="{909E8E84-426E-40dd-AFC4-6F175D3DCCD1}">
-              <a14:hiddenFill xmlns="" xmlns:a14="http://schemas.microsoft.com/office/drawing/2010/main">
+              <a14:hiddenFill xmlns:a14="http://schemas.microsoft.com/office/drawing/2010/main" xmlns="">
                 <a:solidFill>
                   <a:srgbClr val="FFFFFF"/>
                 </a:solidFill>
@@ -27496,14 +27496,14 @@
           </a:ln>
           <a:extLst>
             <a:ext uri="{909E8E84-426E-40dd-AFC4-6F175D3DCCD1}">
-              <a14:hiddenFill xmlns="" xmlns:a14="http://schemas.microsoft.com/office/drawing/2010/main">
+              <a14:hiddenFill xmlns:a14="http://schemas.microsoft.com/office/drawing/2010/main" xmlns="">
                 <a:solidFill>
                   <a:srgbClr val="FFFFFF"/>
                 </a:solidFill>
               </a14:hiddenFill>
             </a:ext>
             <a:ext uri="{91240B29-F687-4f45-9708-019B960494DF}">
-              <a14:hiddenLine xmlns="" xmlns:a14="http://schemas.microsoft.com/office/drawing/2010/main" w="9525">
+              <a14:hiddenLine xmlns:a14="http://schemas.microsoft.com/office/drawing/2010/main" xmlns="" w="9525">
                 <a:solidFill>
                   <a:srgbClr val="000000"/>
                 </a:solidFill>
@@ -27719,14 +27719,14 @@
           </a:ln>
           <a:extLst>
             <a:ext uri="{909E8E84-426E-40dd-AFC4-6F175D3DCCD1}">
-              <a14:hiddenFill xmlns="" xmlns:a14="http://schemas.microsoft.com/office/drawing/2010/main">
+              <a14:hiddenFill xmlns:a14="http://schemas.microsoft.com/office/drawing/2010/main" xmlns="">
                 <a:solidFill>
                   <a:srgbClr val="FFFFFF"/>
                 </a:solidFill>
               </a14:hiddenFill>
             </a:ext>
             <a:ext uri="{91240B29-F687-4f45-9708-019B960494DF}">
-              <a14:hiddenLine xmlns="" xmlns:a14="http://schemas.microsoft.com/office/drawing/2010/main" w="9525">
+              <a14:hiddenLine xmlns:a14="http://schemas.microsoft.com/office/drawing/2010/main" xmlns="" w="9525">
                 <a:solidFill>
                   <a:srgbClr val="000000"/>
                 </a:solidFill>
@@ -28003,7 +28003,7 @@
           </a:ln>
           <a:extLst>
             <a:ext uri="{909E8E84-426E-40dd-AFC4-6F175D3DCCD1}">
-              <a14:hiddenFill xmlns="" xmlns:a14="http://schemas.microsoft.com/office/drawing/2010/main">
+              <a14:hiddenFill xmlns:a14="http://schemas.microsoft.com/office/drawing/2010/main" xmlns="">
                 <a:noFill/>
               </a14:hiddenFill>
             </a:ext>
@@ -28044,7 +28044,7 @@
           </a:ln>
           <a:extLst>
             <a:ext uri="{909E8E84-426E-40dd-AFC4-6F175D3DCCD1}">
-              <a14:hiddenFill xmlns="" xmlns:a14="http://schemas.microsoft.com/office/drawing/2010/main">
+              <a14:hiddenFill xmlns:a14="http://schemas.microsoft.com/office/drawing/2010/main" xmlns="">
                 <a:noFill/>
               </a14:hiddenFill>
             </a:ext>
@@ -28085,7 +28085,7 @@
           </a:ln>
           <a:extLst>
             <a:ext uri="{909E8E84-426E-40dd-AFC4-6F175D3DCCD1}">
-              <a14:hiddenFill xmlns="" xmlns:a14="http://schemas.microsoft.com/office/drawing/2010/main">
+              <a14:hiddenFill xmlns:a14="http://schemas.microsoft.com/office/drawing/2010/main" xmlns="">
                 <a:noFill/>
               </a14:hiddenFill>
             </a:ext>
@@ -28126,7 +28126,7 @@
           </a:ln>
           <a:extLst>
             <a:ext uri="{909E8E84-426E-40dd-AFC4-6F175D3DCCD1}">
-              <a14:hiddenFill xmlns="" xmlns:a14="http://schemas.microsoft.com/office/drawing/2010/main">
+              <a14:hiddenFill xmlns:a14="http://schemas.microsoft.com/office/drawing/2010/main" xmlns="">
                 <a:noFill/>
               </a14:hiddenFill>
             </a:ext>
@@ -28167,7 +28167,7 @@
           </a:ln>
           <a:extLst>
             <a:ext uri="{909E8E84-426E-40dd-AFC4-6F175D3DCCD1}">
-              <a14:hiddenFill xmlns="" xmlns:a14="http://schemas.microsoft.com/office/drawing/2010/main">
+              <a14:hiddenFill xmlns:a14="http://schemas.microsoft.com/office/drawing/2010/main" xmlns="">
                 <a:noFill/>
               </a14:hiddenFill>
             </a:ext>
@@ -28203,14 +28203,14 @@
           </a:ln>
           <a:extLst>
             <a:ext uri="{909E8E84-426E-40dd-AFC4-6F175D3DCCD1}">
-              <a14:hiddenFill xmlns="" xmlns:a14="http://schemas.microsoft.com/office/drawing/2010/main">
+              <a14:hiddenFill xmlns:a14="http://schemas.microsoft.com/office/drawing/2010/main" xmlns="">
                 <a:solidFill>
                   <a:srgbClr val="FFFFFF"/>
                 </a:solidFill>
               </a14:hiddenFill>
             </a:ext>
             <a:ext uri="{91240B29-F687-4f45-9708-019B960494DF}">
-              <a14:hiddenLine xmlns="" xmlns:a14="http://schemas.microsoft.com/office/drawing/2010/main" w="9525">
+              <a14:hiddenLine xmlns:a14="http://schemas.microsoft.com/office/drawing/2010/main" xmlns="" w="9525">
                 <a:solidFill>
                   <a:srgbClr val="000000"/>
                 </a:solidFill>
@@ -28431,7 +28431,7 @@
           </a:ln>
           <a:extLst>
             <a:ext uri="{909E8E84-426E-40dd-AFC4-6F175D3DCCD1}">
-              <a14:hiddenFill xmlns="" xmlns:a14="http://schemas.microsoft.com/office/drawing/2010/main">
+              <a14:hiddenFill xmlns:a14="http://schemas.microsoft.com/office/drawing/2010/main" xmlns="">
                 <a:noFill/>
               </a14:hiddenFill>
             </a:ext>
@@ -30387,14 +30387,14 @@
           </a:ln>
           <a:extLst>
             <a:ext uri="{909E8E84-426E-40dd-AFC4-6F175D3DCCD1}">
-              <a14:hiddenFill xmlns="" xmlns:a14="http://schemas.microsoft.com/office/drawing/2010/main">
+              <a14:hiddenFill xmlns:a14="http://schemas.microsoft.com/office/drawing/2010/main" xmlns="">
                 <a:solidFill>
                   <a:srgbClr val="FFFFFF"/>
                 </a:solidFill>
               </a14:hiddenFill>
             </a:ext>
             <a:ext uri="{91240B29-F687-4f45-9708-019B960494DF}">
-              <a14:hiddenLine xmlns="" xmlns:a14="http://schemas.microsoft.com/office/drawing/2010/main" w="9525">
+              <a14:hiddenLine xmlns:a14="http://schemas.microsoft.com/office/drawing/2010/main" xmlns="" w="9525">
                 <a:solidFill>
                   <a:schemeClr val="tx1"/>
                 </a:solidFill>
@@ -31034,14 +31034,14 @@
           </a:ln>
           <a:extLst>
             <a:ext uri="{909E8E84-426E-40dd-AFC4-6F175D3DCCD1}">
-              <a14:hiddenFill xmlns:a14="http://schemas.microsoft.com/office/drawing/2010/main" xmlns="">
+              <a14:hiddenFill xmlns="" xmlns:a14="http://schemas.microsoft.com/office/drawing/2010/main">
                 <a:solidFill>
                   <a:srgbClr val="FFFFFF"/>
                 </a:solidFill>
               </a14:hiddenFill>
             </a:ext>
             <a:ext uri="{91240B29-F687-4f45-9708-019B960494DF}">
-              <a14:hiddenLine xmlns:a14="http://schemas.microsoft.com/office/drawing/2010/main" xmlns="" w="9525">
+              <a14:hiddenLine xmlns="" xmlns:a14="http://schemas.microsoft.com/office/drawing/2010/main" w="9525">
                 <a:solidFill>
                   <a:schemeClr val="tx1"/>
                 </a:solidFill>
@@ -31558,7 +31558,7 @@
           </a:ln>
           <a:extLst>
             <a:ext uri="{909E8E84-426E-40dd-AFC4-6F175D3DCCD1}">
-              <a14:hiddenFill xmlns="" xmlns:a14="http://schemas.microsoft.com/office/drawing/2010/main">
+              <a14:hiddenFill xmlns:a14="http://schemas.microsoft.com/office/drawing/2010/main" xmlns="">
                 <a:solidFill>
                   <a:srgbClr val="FFFFFF"/>
                 </a:solidFill>
@@ -31782,7 +31782,7 @@
           </a:ln>
           <a:extLst>
             <a:ext uri="{909E8E84-426E-40dd-AFC4-6F175D3DCCD1}">
-              <a14:hiddenFill xmlns="" xmlns:a14="http://schemas.microsoft.com/office/drawing/2010/main">
+              <a14:hiddenFill xmlns:a14="http://schemas.microsoft.com/office/drawing/2010/main" xmlns="">
                 <a:solidFill>
                   <a:srgbClr val="FFFFFF"/>
                 </a:solidFill>
@@ -32006,7 +32006,7 @@
           </a:ln>
           <a:extLst>
             <a:ext uri="{909E8E84-426E-40dd-AFC4-6F175D3DCCD1}">
-              <a14:hiddenFill xmlns="" xmlns:a14="http://schemas.microsoft.com/office/drawing/2010/main">
+              <a14:hiddenFill xmlns:a14="http://schemas.microsoft.com/office/drawing/2010/main" xmlns="">
                 <a:solidFill>
                   <a:srgbClr val="FFFFFF"/>
                 </a:solidFill>
@@ -32230,7 +32230,7 @@
           </a:ln>
           <a:extLst>
             <a:ext uri="{909E8E84-426E-40dd-AFC4-6F175D3DCCD1}">
-              <a14:hiddenFill xmlns="" xmlns:a14="http://schemas.microsoft.com/office/drawing/2010/main">
+              <a14:hiddenFill xmlns:a14="http://schemas.microsoft.com/office/drawing/2010/main" xmlns="">
                 <a:solidFill>
                   <a:srgbClr val="FFFFFF"/>
                 </a:solidFill>
@@ -32454,7 +32454,7 @@
           </a:ln>
           <a:extLst>
             <a:ext uri="{909E8E84-426E-40dd-AFC4-6F175D3DCCD1}">
-              <a14:hiddenFill xmlns="" xmlns:a14="http://schemas.microsoft.com/office/drawing/2010/main">
+              <a14:hiddenFill xmlns:a14="http://schemas.microsoft.com/office/drawing/2010/main" xmlns="">
                 <a:solidFill>
                   <a:srgbClr val="FFFFFF"/>
                 </a:solidFill>
